--- a/Kosiarkobot 2.0 - Prezentacja Projektu.pptx
+++ b/Kosiarkobot 2.0 - Prezentacja Projektu.pptx
@@ -27,14 +27,14 @@
   <p:notesSz cx="6858000" cy="9144000"/>
   <p:embeddedFontLst>
     <p:embeddedFont>
-      <p:font typeface="Urbanist SemiBold" panose="020B0604020202020204" charset="-18"/>
+      <p:font typeface="Urbanist" panose="020B0604020202020204" charset="-18"/>
       <p:regular r:id="rId17"/>
       <p:bold r:id="rId18"/>
       <p:italic r:id="rId19"/>
       <p:boldItalic r:id="rId20"/>
     </p:embeddedFont>
     <p:embeddedFont>
-      <p:font typeface="Urbanist" panose="020B0604020202020204" charset="-18"/>
+      <p:font typeface="Urbanist SemiBold" panose="020B0604020202020204" charset="-18"/>
       <p:regular r:id="rId21"/>
       <p:bold r:id="rId22"/>
       <p:italic r:id="rId23"/>
@@ -12777,7 +12777,7 @@
               <a:buNone/>
             </a:pPr>
             <a:r>
-              <a:rPr lang="en-US" sz="1500" b="0" i="0" u="none" strike="noStrike" cap="none">
+              <a:rPr lang="en-US" sz="1500" b="0" i="0" u="none" strike="noStrike" cap="none" dirty="0" err="1">
                 <a:solidFill>
                   <a:srgbClr val="475569"/>
                 </a:solidFill>
@@ -12786,9 +12786,453 @@
                 <a:cs typeface="Urbanist"/>
                 <a:sym typeface="Urbanist"/>
               </a:rPr>
-              <a:t>Wdrożenie mechanizmu ochrony integralności podczas usuwania rekordów. Rozwiązano problem anomalii usuwania (deletion anomaly) poprzez analizę powiązań kluczy obcych i logikę warstwy serwisu.</a:t>
-            </a:r>
-            <a:endParaRPr/>
+              <a:t>Wdrożenie</a:t>
+            </a:r>
+            <a:r>
+              <a:rPr lang="en-US" sz="1500" b="0" i="0" u="none" strike="noStrike" cap="none" dirty="0">
+                <a:solidFill>
+                  <a:srgbClr val="475569"/>
+                </a:solidFill>
+                <a:latin typeface="Urbanist"/>
+                <a:ea typeface="Urbanist"/>
+                <a:cs typeface="Urbanist"/>
+                <a:sym typeface="Urbanist"/>
+              </a:rPr>
+              <a:t> </a:t>
+            </a:r>
+            <a:r>
+              <a:rPr lang="en-US" sz="1500" b="0" i="0" u="none" strike="noStrike" cap="none" dirty="0" err="1">
+                <a:solidFill>
+                  <a:srgbClr val="475569"/>
+                </a:solidFill>
+                <a:latin typeface="Urbanist"/>
+                <a:ea typeface="Urbanist"/>
+                <a:cs typeface="Urbanist"/>
+                <a:sym typeface="Urbanist"/>
+              </a:rPr>
+              <a:t>mechanizmu</a:t>
+            </a:r>
+            <a:r>
+              <a:rPr lang="en-US" sz="1500" b="0" i="0" u="none" strike="noStrike" cap="none" dirty="0">
+                <a:solidFill>
+                  <a:srgbClr val="475569"/>
+                </a:solidFill>
+                <a:latin typeface="Urbanist"/>
+                <a:ea typeface="Urbanist"/>
+                <a:cs typeface="Urbanist"/>
+                <a:sym typeface="Urbanist"/>
+              </a:rPr>
+              <a:t> </a:t>
+            </a:r>
+            <a:r>
+              <a:rPr lang="en-US" sz="1500" b="0" i="0" u="none" strike="noStrike" cap="none" dirty="0" err="1">
+                <a:solidFill>
+                  <a:srgbClr val="475569"/>
+                </a:solidFill>
+                <a:latin typeface="Urbanist"/>
+                <a:ea typeface="Urbanist"/>
+                <a:cs typeface="Urbanist"/>
+                <a:sym typeface="Urbanist"/>
+              </a:rPr>
+              <a:t>ochrony</a:t>
+            </a:r>
+            <a:r>
+              <a:rPr lang="en-US" sz="1500" b="0" i="0" u="none" strike="noStrike" cap="none" dirty="0">
+                <a:solidFill>
+                  <a:srgbClr val="475569"/>
+                </a:solidFill>
+                <a:latin typeface="Urbanist"/>
+                <a:ea typeface="Urbanist"/>
+                <a:cs typeface="Urbanist"/>
+                <a:sym typeface="Urbanist"/>
+              </a:rPr>
+              <a:t> </a:t>
+            </a:r>
+            <a:r>
+              <a:rPr lang="en-US" sz="1500" b="0" i="0" u="none" strike="noStrike" cap="none" dirty="0" err="1">
+                <a:solidFill>
+                  <a:srgbClr val="475569"/>
+                </a:solidFill>
+                <a:latin typeface="Urbanist"/>
+                <a:ea typeface="Urbanist"/>
+                <a:cs typeface="Urbanist"/>
+                <a:sym typeface="Urbanist"/>
+              </a:rPr>
+              <a:t>integralności</a:t>
+            </a:r>
+            <a:r>
+              <a:rPr lang="en-US" sz="1500" b="0" i="0" u="none" strike="noStrike" cap="none" dirty="0">
+                <a:solidFill>
+                  <a:srgbClr val="475569"/>
+                </a:solidFill>
+                <a:latin typeface="Urbanist"/>
+                <a:ea typeface="Urbanist"/>
+                <a:cs typeface="Urbanist"/>
+                <a:sym typeface="Urbanist"/>
+              </a:rPr>
+              <a:t> </a:t>
+            </a:r>
+            <a:r>
+              <a:rPr lang="en-US" sz="1500" b="0" i="0" u="none" strike="noStrike" cap="none" dirty="0" err="1">
+                <a:solidFill>
+                  <a:srgbClr val="475569"/>
+                </a:solidFill>
+                <a:latin typeface="Urbanist"/>
+                <a:ea typeface="Urbanist"/>
+                <a:cs typeface="Urbanist"/>
+                <a:sym typeface="Urbanist"/>
+              </a:rPr>
+              <a:t>podczas</a:t>
+            </a:r>
+            <a:r>
+              <a:rPr lang="en-US" sz="1500" b="0" i="0" u="none" strike="noStrike" cap="none" dirty="0">
+                <a:solidFill>
+                  <a:srgbClr val="475569"/>
+                </a:solidFill>
+                <a:latin typeface="Urbanist"/>
+                <a:ea typeface="Urbanist"/>
+                <a:cs typeface="Urbanist"/>
+                <a:sym typeface="Urbanist"/>
+              </a:rPr>
+              <a:t> </a:t>
+            </a:r>
+            <a:r>
+              <a:rPr lang="en-US" sz="1500" b="0" i="0" u="none" strike="noStrike" cap="none" dirty="0" err="1">
+                <a:solidFill>
+                  <a:srgbClr val="475569"/>
+                </a:solidFill>
+                <a:latin typeface="Urbanist"/>
+                <a:ea typeface="Urbanist"/>
+                <a:cs typeface="Urbanist"/>
+                <a:sym typeface="Urbanist"/>
+              </a:rPr>
+              <a:t>usuwania</a:t>
+            </a:r>
+            <a:r>
+              <a:rPr lang="en-US" sz="1500" b="0" i="0" u="none" strike="noStrike" cap="none" dirty="0">
+                <a:solidFill>
+                  <a:srgbClr val="475569"/>
+                </a:solidFill>
+                <a:latin typeface="Urbanist"/>
+                <a:ea typeface="Urbanist"/>
+                <a:cs typeface="Urbanist"/>
+                <a:sym typeface="Urbanist"/>
+              </a:rPr>
+              <a:t> </a:t>
+            </a:r>
+            <a:r>
+              <a:rPr lang="en-US" sz="1500" b="0" i="0" u="none" strike="noStrike" cap="none" dirty="0" err="1">
+                <a:solidFill>
+                  <a:srgbClr val="475569"/>
+                </a:solidFill>
+                <a:latin typeface="Urbanist"/>
+                <a:ea typeface="Urbanist"/>
+                <a:cs typeface="Urbanist"/>
+                <a:sym typeface="Urbanist"/>
+              </a:rPr>
+              <a:t>rekordów</a:t>
+            </a:r>
+            <a:r>
+              <a:rPr lang="en-US" sz="1500" b="0" i="0" u="none" strike="noStrike" cap="none" dirty="0">
+                <a:solidFill>
+                  <a:srgbClr val="475569"/>
+                </a:solidFill>
+                <a:latin typeface="Urbanist"/>
+                <a:ea typeface="Urbanist"/>
+                <a:cs typeface="Urbanist"/>
+                <a:sym typeface="Urbanist"/>
+              </a:rPr>
+              <a:t>. </a:t>
+            </a:r>
+            <a:r>
+              <a:rPr lang="en-US" sz="1500" b="0" i="0" u="none" strike="noStrike" cap="none" dirty="0" err="1">
+                <a:solidFill>
+                  <a:srgbClr val="475569"/>
+                </a:solidFill>
+                <a:latin typeface="Urbanist"/>
+                <a:ea typeface="Urbanist"/>
+                <a:cs typeface="Urbanist"/>
+                <a:sym typeface="Urbanist"/>
+              </a:rPr>
+              <a:t>Rozwiązano</a:t>
+            </a:r>
+            <a:r>
+              <a:rPr lang="en-US" sz="1500" b="0" i="0" u="none" strike="noStrike" cap="none" dirty="0">
+                <a:solidFill>
+                  <a:srgbClr val="475569"/>
+                </a:solidFill>
+                <a:latin typeface="Urbanist"/>
+                <a:ea typeface="Urbanist"/>
+                <a:cs typeface="Urbanist"/>
+                <a:sym typeface="Urbanist"/>
+              </a:rPr>
+              <a:t> problem </a:t>
+            </a:r>
+            <a:r>
+              <a:rPr lang="en-US" sz="1500" b="0" i="0" u="none" strike="noStrike" cap="none">
+                <a:solidFill>
+                  <a:srgbClr val="475569"/>
+                </a:solidFill>
+                <a:latin typeface="Urbanist"/>
+                <a:ea typeface="Urbanist"/>
+                <a:cs typeface="Urbanist"/>
+                <a:sym typeface="Urbanist"/>
+              </a:rPr>
+              <a:t>anomalii</a:t>
+            </a:r>
+            <a:r>
+              <a:rPr lang="en-US" sz="1500" b="0" i="0" u="none" strike="noStrike" cap="none" dirty="0">
+                <a:solidFill>
+                  <a:srgbClr val="475569"/>
+                </a:solidFill>
+                <a:latin typeface="Urbanist"/>
+                <a:ea typeface="Urbanist"/>
+                <a:cs typeface="Urbanist"/>
+                <a:sym typeface="Urbanist"/>
+              </a:rPr>
+              <a:t> </a:t>
+            </a:r>
+            <a:r>
+              <a:rPr lang="en-US" sz="1500" b="0" i="0" u="none" strike="noStrike" cap="none" dirty="0" err="1">
+                <a:solidFill>
+                  <a:srgbClr val="475569"/>
+                </a:solidFill>
+                <a:latin typeface="Urbanist"/>
+                <a:ea typeface="Urbanist"/>
+                <a:cs typeface="Urbanist"/>
+                <a:sym typeface="Urbanist"/>
+              </a:rPr>
+              <a:t>usuwania</a:t>
+            </a:r>
+            <a:r>
+              <a:rPr lang="en-US" sz="1500" b="0" i="0" u="none" strike="noStrike" cap="none" dirty="0">
+                <a:solidFill>
+                  <a:srgbClr val="475569"/>
+                </a:solidFill>
+                <a:latin typeface="Urbanist"/>
+                <a:ea typeface="Urbanist"/>
+                <a:cs typeface="Urbanist"/>
+                <a:sym typeface="Urbanist"/>
+              </a:rPr>
+              <a:t> (deletion anomaly) </a:t>
+            </a:r>
+            <a:r>
+              <a:rPr lang="en-US" sz="1500" b="0" i="0" u="none" strike="noStrike" cap="none" dirty="0" err="1">
+                <a:solidFill>
+                  <a:srgbClr val="475569"/>
+                </a:solidFill>
+                <a:latin typeface="Urbanist"/>
+                <a:ea typeface="Urbanist"/>
+                <a:cs typeface="Urbanist"/>
+                <a:sym typeface="Urbanist"/>
+              </a:rPr>
+              <a:t>poprzez</a:t>
+            </a:r>
+            <a:r>
+              <a:rPr lang="en-US" sz="1500" b="0" i="0" u="none" strike="noStrike" cap="none" dirty="0">
+                <a:solidFill>
+                  <a:srgbClr val="475569"/>
+                </a:solidFill>
+                <a:latin typeface="Urbanist"/>
+                <a:ea typeface="Urbanist"/>
+                <a:cs typeface="Urbanist"/>
+                <a:sym typeface="Urbanist"/>
+              </a:rPr>
+              <a:t> </a:t>
+            </a:r>
+            <a:r>
+              <a:rPr lang="en-US" sz="1500" b="0" i="0" u="none" strike="noStrike" cap="none" dirty="0" err="1">
+                <a:solidFill>
+                  <a:srgbClr val="475569"/>
+                </a:solidFill>
+                <a:latin typeface="Urbanist"/>
+                <a:ea typeface="Urbanist"/>
+                <a:cs typeface="Urbanist"/>
+                <a:sym typeface="Urbanist"/>
+              </a:rPr>
+              <a:t>analizę</a:t>
+            </a:r>
+            <a:r>
+              <a:rPr lang="en-US" sz="1500" b="0" i="0" u="none" strike="noStrike" cap="none" dirty="0">
+                <a:solidFill>
+                  <a:srgbClr val="475569"/>
+                </a:solidFill>
+                <a:latin typeface="Urbanist"/>
+                <a:ea typeface="Urbanist"/>
+                <a:cs typeface="Urbanist"/>
+                <a:sym typeface="Urbanist"/>
+              </a:rPr>
+              <a:t> </a:t>
+            </a:r>
+            <a:r>
+              <a:rPr lang="en-US" sz="1500" b="0" i="0" u="none" strike="noStrike" cap="none" dirty="0" err="1">
+                <a:solidFill>
+                  <a:srgbClr val="475569"/>
+                </a:solidFill>
+                <a:latin typeface="Urbanist"/>
+                <a:ea typeface="Urbanist"/>
+                <a:cs typeface="Urbanist"/>
+                <a:sym typeface="Urbanist"/>
+              </a:rPr>
+              <a:t>powiązań</a:t>
+            </a:r>
+            <a:r>
+              <a:rPr lang="en-US" sz="1500" b="0" i="0" u="none" strike="noStrike" cap="none" dirty="0">
+                <a:solidFill>
+                  <a:srgbClr val="475569"/>
+                </a:solidFill>
+                <a:latin typeface="Urbanist"/>
+                <a:ea typeface="Urbanist"/>
+                <a:cs typeface="Urbanist"/>
+                <a:sym typeface="Urbanist"/>
+              </a:rPr>
+              <a:t> </a:t>
+            </a:r>
+            <a:r>
+              <a:rPr lang="en-US" sz="1500" b="0" i="0" u="none" strike="noStrike" cap="none" dirty="0" err="1">
+                <a:solidFill>
+                  <a:srgbClr val="475569"/>
+                </a:solidFill>
+                <a:latin typeface="Urbanist"/>
+                <a:ea typeface="Urbanist"/>
+                <a:cs typeface="Urbanist"/>
+                <a:sym typeface="Urbanist"/>
+              </a:rPr>
+              <a:t>kluczy</a:t>
+            </a:r>
+            <a:r>
+              <a:rPr lang="en-US" sz="1500" b="0" i="0" u="none" strike="noStrike" cap="none" dirty="0">
+                <a:solidFill>
+                  <a:srgbClr val="475569"/>
+                </a:solidFill>
+                <a:latin typeface="Urbanist"/>
+                <a:ea typeface="Urbanist"/>
+                <a:cs typeface="Urbanist"/>
+                <a:sym typeface="Urbanist"/>
+              </a:rPr>
+              <a:t> </a:t>
+            </a:r>
+            <a:r>
+              <a:rPr lang="en-US" sz="1500" b="0" i="0" u="none" strike="noStrike" cap="none" dirty="0" err="1">
+                <a:solidFill>
+                  <a:srgbClr val="475569"/>
+                </a:solidFill>
+                <a:latin typeface="Urbanist"/>
+                <a:ea typeface="Urbanist"/>
+                <a:cs typeface="Urbanist"/>
+                <a:sym typeface="Urbanist"/>
+              </a:rPr>
+              <a:t>obcych</a:t>
+            </a:r>
+            <a:r>
+              <a:rPr lang="en-US" sz="1500" b="0" i="0" u="none" strike="noStrike" cap="none" dirty="0">
+                <a:solidFill>
+                  <a:srgbClr val="475569"/>
+                </a:solidFill>
+                <a:latin typeface="Urbanist"/>
+                <a:ea typeface="Urbanist"/>
+                <a:cs typeface="Urbanist"/>
+                <a:sym typeface="Urbanist"/>
+              </a:rPr>
+              <a:t> </a:t>
+            </a:r>
+            <a:r>
+              <a:rPr lang="en-US" sz="1500" b="0" i="0" u="none" strike="noStrike" cap="none" dirty="0" err="1">
+                <a:solidFill>
+                  <a:srgbClr val="475569"/>
+                </a:solidFill>
+                <a:latin typeface="Urbanist"/>
+                <a:ea typeface="Urbanist"/>
+                <a:cs typeface="Urbanist"/>
+                <a:sym typeface="Urbanist"/>
+              </a:rPr>
+              <a:t>i</a:t>
+            </a:r>
+            <a:r>
+              <a:rPr lang="en-US" sz="1500" b="0" i="0" u="none" strike="noStrike" cap="none" dirty="0">
+                <a:solidFill>
+                  <a:srgbClr val="475569"/>
+                </a:solidFill>
+                <a:latin typeface="Urbanist"/>
+                <a:ea typeface="Urbanist"/>
+                <a:cs typeface="Urbanist"/>
+                <a:sym typeface="Urbanist"/>
+              </a:rPr>
+              <a:t> </a:t>
+            </a:r>
+            <a:r>
+              <a:rPr lang="en-US" sz="1500" b="0" i="0" u="none" strike="noStrike" cap="none" dirty="0" err="1">
+                <a:solidFill>
+                  <a:srgbClr val="475569"/>
+                </a:solidFill>
+                <a:latin typeface="Urbanist"/>
+                <a:ea typeface="Urbanist"/>
+                <a:cs typeface="Urbanist"/>
+                <a:sym typeface="Urbanist"/>
+              </a:rPr>
+              <a:t>logikę</a:t>
+            </a:r>
+            <a:r>
+              <a:rPr lang="en-US" sz="1500" b="0" i="0" u="none" strike="noStrike" cap="none" dirty="0">
+                <a:solidFill>
+                  <a:srgbClr val="475569"/>
+                </a:solidFill>
+                <a:latin typeface="Urbanist"/>
+                <a:ea typeface="Urbanist"/>
+                <a:cs typeface="Urbanist"/>
+                <a:sym typeface="Urbanist"/>
+              </a:rPr>
+              <a:t> </a:t>
+            </a:r>
+            <a:r>
+              <a:rPr lang="en-US" sz="1500" b="0" i="0" u="none" strike="noStrike" cap="none" dirty="0" err="1">
+                <a:solidFill>
+                  <a:srgbClr val="475569"/>
+                </a:solidFill>
+                <a:latin typeface="Urbanist"/>
+                <a:ea typeface="Urbanist"/>
+                <a:cs typeface="Urbanist"/>
+                <a:sym typeface="Urbanist"/>
+              </a:rPr>
+              <a:t>warstwy</a:t>
+            </a:r>
+            <a:r>
+              <a:rPr lang="en-US" sz="1500" b="0" i="0" u="none" strike="noStrike" cap="none" dirty="0">
+                <a:solidFill>
+                  <a:srgbClr val="475569"/>
+                </a:solidFill>
+                <a:latin typeface="Urbanist"/>
+                <a:ea typeface="Urbanist"/>
+                <a:cs typeface="Urbanist"/>
+                <a:sym typeface="Urbanist"/>
+              </a:rPr>
+              <a:t> </a:t>
+            </a:r>
+            <a:r>
+              <a:rPr lang="en-US" sz="1500" b="0" i="0" u="none" strike="noStrike" cap="none" dirty="0" err="1">
+                <a:solidFill>
+                  <a:srgbClr val="475569"/>
+                </a:solidFill>
+                <a:latin typeface="Urbanist"/>
+                <a:ea typeface="Urbanist"/>
+                <a:cs typeface="Urbanist"/>
+                <a:sym typeface="Urbanist"/>
+              </a:rPr>
+              <a:t>serwisu</a:t>
+            </a:r>
+            <a:r>
+              <a:rPr lang="en-US" sz="1500" b="0" i="0" u="none" strike="noStrike" cap="none" dirty="0">
+                <a:solidFill>
+                  <a:srgbClr val="475569"/>
+                </a:solidFill>
+                <a:latin typeface="Urbanist"/>
+                <a:ea typeface="Urbanist"/>
+                <a:cs typeface="Urbanist"/>
+                <a:sym typeface="Urbanist"/>
+              </a:rPr>
+              <a:t>.</a:t>
+            </a:r>
+            <a:endParaRPr dirty="0"/>
           </a:p>
         </p:txBody>
       </p:sp>
@@ -16458,33 +16902,6 @@
           </a:ln>
         </p:spPr>
       </p:pic>
-      <p:pic>
-        <p:nvPicPr>
-          <p:cNvPr id="113" name="Google Shape;113;p16" descr="image.png"/>
-          <p:cNvPicPr preferRelativeResize="0"/>
-          <p:nvPr/>
-        </p:nvPicPr>
-        <p:blipFill rotWithShape="1">
-          <a:blip r:embed="rId4">
-            <a:alphaModFix/>
-          </a:blip>
-          <a:srcRect/>
-          <a:stretch/>
-        </p:blipFill>
-        <p:spPr>
-          <a:xfrm>
-            <a:off x="6381750" y="2078533"/>
-            <a:ext cx="5238750" cy="3739157"/>
-          </a:xfrm>
-          <a:prstGeom prst="rect">
-            <a:avLst/>
-          </a:prstGeom>
-          <a:noFill/>
-          <a:ln>
-            <a:noFill/>
-          </a:ln>
-        </p:spPr>
-      </p:pic>
       <p:sp>
         <p:nvSpPr>
           <p:cNvPr id="114" name="Google Shape;114;p16"/>
@@ -16493,7 +16910,7 @@
         </p:nvSpPr>
         <p:spPr>
           <a:xfrm>
-            <a:off x="571500" y="2078533"/>
+            <a:off x="571500" y="1804392"/>
             <a:ext cx="5500687" cy="323850"/>
           </a:xfrm>
           <a:prstGeom prst="rect">
@@ -16520,7 +16937,7 @@
               <a:buNone/>
             </a:pPr>
             <a:r>
-              <a:rPr lang="en-US" sz="2100" b="0" i="0" u="none" strike="noStrike" cap="none">
+              <a:rPr lang="en-US" sz="2100" b="0" i="0" u="none" strike="noStrike" cap="none" dirty="0" err="1">
                 <a:solidFill>
                   <a:srgbClr val="334155"/>
                 </a:solidFill>
@@ -16529,9 +16946,33 @@
                 <a:cs typeface="Urbanist SemiBold"/>
                 <a:sym typeface="Urbanist SemiBold"/>
               </a:rPr>
-              <a:t>Paradygmat Modernizacji</a:t>
-            </a:r>
-            <a:endParaRPr/>
+              <a:t>Paradygmat</a:t>
+            </a:r>
+            <a:r>
+              <a:rPr lang="en-US" sz="2100" b="0" i="0" u="none" strike="noStrike" cap="none" dirty="0">
+                <a:solidFill>
+                  <a:srgbClr val="334155"/>
+                </a:solidFill>
+                <a:latin typeface="Urbanist SemiBold"/>
+                <a:ea typeface="Urbanist SemiBold"/>
+                <a:cs typeface="Urbanist SemiBold"/>
+                <a:sym typeface="Urbanist SemiBold"/>
+              </a:rPr>
+              <a:t> </a:t>
+            </a:r>
+            <a:r>
+              <a:rPr lang="en-US" sz="2100" b="0" i="0" u="none" strike="noStrike" cap="none" dirty="0" err="1">
+                <a:solidFill>
+                  <a:srgbClr val="334155"/>
+                </a:solidFill>
+                <a:latin typeface="Urbanist SemiBold"/>
+                <a:ea typeface="Urbanist SemiBold"/>
+                <a:cs typeface="Urbanist SemiBold"/>
+                <a:sym typeface="Urbanist SemiBold"/>
+              </a:rPr>
+              <a:t>Modernizacji</a:t>
+            </a:r>
+            <a:endParaRPr dirty="0"/>
           </a:p>
         </p:txBody>
       </p:sp>
@@ -16543,7 +16984,7 @@
         </p:nvSpPr>
         <p:spPr>
           <a:xfrm>
-            <a:off x="571500" y="2545258"/>
+            <a:off x="571500" y="2370361"/>
             <a:ext cx="5238750" cy="1219200"/>
           </a:xfrm>
           <a:prstGeom prst="rect">
@@ -16573,7 +17014,7 @@
               <a:buNone/>
             </a:pPr>
             <a:r>
-              <a:rPr lang="en-US" sz="1500" b="0" i="0" u="none" strike="noStrike" cap="none">
+              <a:rPr lang="en-US" sz="1500" b="0" i="0" u="none" strike="noStrike" cap="none" dirty="0" err="1">
                 <a:solidFill>
                   <a:srgbClr val="475569"/>
                 </a:solidFill>
@@ -16582,39 +17023,552 @@
                 <a:cs typeface="Urbanist"/>
                 <a:sym typeface="Urbanist"/>
               </a:rPr>
-              <a:t>Świadoma decyzja o rezygnacji z biblioteki JavaFX na rzecz rozwiązań serwerowych. Przejście z modelu lokalnego na architekturę webową pozwoliło na centralizację danych i poprawę ergonomii pracy biurowej.</a:t>
-            </a:r>
-            <a:endParaRPr/>
+              <a:t>Świadoma</a:t>
+            </a:r>
+            <a:r>
+              <a:rPr lang="en-US" sz="1500" b="0" i="0" u="none" strike="noStrike" cap="none" dirty="0">
+                <a:solidFill>
+                  <a:srgbClr val="475569"/>
+                </a:solidFill>
+                <a:latin typeface="Urbanist"/>
+                <a:ea typeface="Urbanist"/>
+                <a:cs typeface="Urbanist"/>
+                <a:sym typeface="Urbanist"/>
+              </a:rPr>
+              <a:t> </a:t>
+            </a:r>
+            <a:r>
+              <a:rPr lang="en-US" sz="1500" b="0" i="0" u="none" strike="noStrike" cap="none" dirty="0" err="1">
+                <a:solidFill>
+                  <a:srgbClr val="475569"/>
+                </a:solidFill>
+                <a:latin typeface="Urbanist"/>
+                <a:ea typeface="Urbanist"/>
+                <a:cs typeface="Urbanist"/>
+                <a:sym typeface="Urbanist"/>
+              </a:rPr>
+              <a:t>decyzja</a:t>
+            </a:r>
+            <a:r>
+              <a:rPr lang="en-US" sz="1500" b="0" i="0" u="none" strike="noStrike" cap="none" dirty="0">
+                <a:solidFill>
+                  <a:srgbClr val="475569"/>
+                </a:solidFill>
+                <a:latin typeface="Urbanist"/>
+                <a:ea typeface="Urbanist"/>
+                <a:cs typeface="Urbanist"/>
+                <a:sym typeface="Urbanist"/>
+              </a:rPr>
+              <a:t> o </a:t>
+            </a:r>
+            <a:r>
+              <a:rPr lang="en-US" sz="1500" b="0" i="0" u="none" strike="noStrike" cap="none" dirty="0" err="1">
+                <a:solidFill>
+                  <a:srgbClr val="475569"/>
+                </a:solidFill>
+                <a:latin typeface="Urbanist"/>
+                <a:ea typeface="Urbanist"/>
+                <a:cs typeface="Urbanist"/>
+                <a:sym typeface="Urbanist"/>
+              </a:rPr>
+              <a:t>rezygnacji</a:t>
+            </a:r>
+            <a:r>
+              <a:rPr lang="en-US" sz="1500" b="0" i="0" u="none" strike="noStrike" cap="none" dirty="0">
+                <a:solidFill>
+                  <a:srgbClr val="475569"/>
+                </a:solidFill>
+                <a:latin typeface="Urbanist"/>
+                <a:ea typeface="Urbanist"/>
+                <a:cs typeface="Urbanist"/>
+                <a:sym typeface="Urbanist"/>
+              </a:rPr>
+              <a:t> z </a:t>
+            </a:r>
+            <a:r>
+              <a:rPr lang="en-US" sz="1500" b="0" i="0" u="none" strike="noStrike" cap="none" dirty="0" err="1">
+                <a:solidFill>
+                  <a:srgbClr val="475569"/>
+                </a:solidFill>
+                <a:latin typeface="Urbanist"/>
+                <a:ea typeface="Urbanist"/>
+                <a:cs typeface="Urbanist"/>
+                <a:sym typeface="Urbanist"/>
+              </a:rPr>
+              <a:t>biblioteki</a:t>
+            </a:r>
+            <a:r>
+              <a:rPr lang="en-US" sz="1500" b="0" i="0" u="none" strike="noStrike" cap="none" dirty="0">
+                <a:solidFill>
+                  <a:srgbClr val="475569"/>
+                </a:solidFill>
+                <a:latin typeface="Urbanist"/>
+                <a:ea typeface="Urbanist"/>
+                <a:cs typeface="Urbanist"/>
+                <a:sym typeface="Urbanist"/>
+              </a:rPr>
+              <a:t> JavaFX </a:t>
+            </a:r>
+            <a:r>
+              <a:rPr lang="en-US" sz="1500" b="0" i="0" u="none" strike="noStrike" cap="none" dirty="0" err="1">
+                <a:solidFill>
+                  <a:srgbClr val="475569"/>
+                </a:solidFill>
+                <a:latin typeface="Urbanist"/>
+                <a:ea typeface="Urbanist"/>
+                <a:cs typeface="Urbanist"/>
+                <a:sym typeface="Urbanist"/>
+              </a:rPr>
+              <a:t>na</a:t>
+            </a:r>
+            <a:r>
+              <a:rPr lang="en-US" sz="1500" b="0" i="0" u="none" strike="noStrike" cap="none" dirty="0">
+                <a:solidFill>
+                  <a:srgbClr val="475569"/>
+                </a:solidFill>
+                <a:latin typeface="Urbanist"/>
+                <a:ea typeface="Urbanist"/>
+                <a:cs typeface="Urbanist"/>
+                <a:sym typeface="Urbanist"/>
+              </a:rPr>
+              <a:t> </a:t>
+            </a:r>
+            <a:r>
+              <a:rPr lang="en-US" sz="1500" b="0" i="0" u="none" strike="noStrike" cap="none" dirty="0" err="1">
+                <a:solidFill>
+                  <a:srgbClr val="475569"/>
+                </a:solidFill>
+                <a:latin typeface="Urbanist"/>
+                <a:ea typeface="Urbanist"/>
+                <a:cs typeface="Urbanist"/>
+                <a:sym typeface="Urbanist"/>
+              </a:rPr>
+              <a:t>rzecz</a:t>
+            </a:r>
+            <a:r>
+              <a:rPr lang="en-US" sz="1500" b="0" i="0" u="none" strike="noStrike" cap="none" dirty="0">
+                <a:solidFill>
+                  <a:srgbClr val="475569"/>
+                </a:solidFill>
+                <a:latin typeface="Urbanist"/>
+                <a:ea typeface="Urbanist"/>
+                <a:cs typeface="Urbanist"/>
+                <a:sym typeface="Urbanist"/>
+              </a:rPr>
+              <a:t> </a:t>
+            </a:r>
+            <a:r>
+              <a:rPr lang="en-US" sz="1500" b="0" i="0" u="none" strike="noStrike" cap="none" dirty="0" err="1">
+                <a:solidFill>
+                  <a:srgbClr val="475569"/>
+                </a:solidFill>
+                <a:latin typeface="Urbanist"/>
+                <a:ea typeface="Urbanist"/>
+                <a:cs typeface="Urbanist"/>
+                <a:sym typeface="Urbanist"/>
+              </a:rPr>
+              <a:t>rozwiązań</a:t>
+            </a:r>
+            <a:r>
+              <a:rPr lang="en-US" sz="1500" b="0" i="0" u="none" strike="noStrike" cap="none" dirty="0">
+                <a:solidFill>
+                  <a:srgbClr val="475569"/>
+                </a:solidFill>
+                <a:latin typeface="Urbanist"/>
+                <a:ea typeface="Urbanist"/>
+                <a:cs typeface="Urbanist"/>
+                <a:sym typeface="Urbanist"/>
+              </a:rPr>
+              <a:t> </a:t>
+            </a:r>
+            <a:r>
+              <a:rPr lang="en-US" sz="1500" b="0" i="0" u="none" strike="noStrike" cap="none" dirty="0" err="1">
+                <a:solidFill>
+                  <a:srgbClr val="475569"/>
+                </a:solidFill>
+                <a:latin typeface="Urbanist"/>
+                <a:ea typeface="Urbanist"/>
+                <a:cs typeface="Urbanist"/>
+                <a:sym typeface="Urbanist"/>
+              </a:rPr>
+              <a:t>serwerowych</a:t>
+            </a:r>
+            <a:r>
+              <a:rPr lang="en-US" sz="1500" b="0" i="0" u="none" strike="noStrike" cap="none" dirty="0">
+                <a:solidFill>
+                  <a:srgbClr val="475569"/>
+                </a:solidFill>
+                <a:latin typeface="Urbanist"/>
+                <a:ea typeface="Urbanist"/>
+                <a:cs typeface="Urbanist"/>
+                <a:sym typeface="Urbanist"/>
+              </a:rPr>
+              <a:t>. </a:t>
+            </a:r>
+            <a:r>
+              <a:rPr lang="en-US" sz="1500" b="0" i="0" u="none" strike="noStrike" cap="none" dirty="0" err="1">
+                <a:solidFill>
+                  <a:srgbClr val="475569"/>
+                </a:solidFill>
+                <a:latin typeface="Urbanist"/>
+                <a:ea typeface="Urbanist"/>
+                <a:cs typeface="Urbanist"/>
+                <a:sym typeface="Urbanist"/>
+              </a:rPr>
+              <a:t>Przejście</a:t>
+            </a:r>
+            <a:r>
+              <a:rPr lang="en-US" sz="1500" b="0" i="0" u="none" strike="noStrike" cap="none" dirty="0">
+                <a:solidFill>
+                  <a:srgbClr val="475569"/>
+                </a:solidFill>
+                <a:latin typeface="Urbanist"/>
+                <a:ea typeface="Urbanist"/>
+                <a:cs typeface="Urbanist"/>
+                <a:sym typeface="Urbanist"/>
+              </a:rPr>
+              <a:t> z </a:t>
+            </a:r>
+            <a:r>
+              <a:rPr lang="en-US" sz="1500" b="0" i="0" u="none" strike="noStrike" cap="none" dirty="0" err="1">
+                <a:solidFill>
+                  <a:srgbClr val="475569"/>
+                </a:solidFill>
+                <a:latin typeface="Urbanist"/>
+                <a:ea typeface="Urbanist"/>
+                <a:cs typeface="Urbanist"/>
+                <a:sym typeface="Urbanist"/>
+              </a:rPr>
+              <a:t>modelu</a:t>
+            </a:r>
+            <a:r>
+              <a:rPr lang="en-US" sz="1500" b="0" i="0" u="none" strike="noStrike" cap="none" dirty="0">
+                <a:solidFill>
+                  <a:srgbClr val="475569"/>
+                </a:solidFill>
+                <a:latin typeface="Urbanist"/>
+                <a:ea typeface="Urbanist"/>
+                <a:cs typeface="Urbanist"/>
+                <a:sym typeface="Urbanist"/>
+              </a:rPr>
+              <a:t> </a:t>
+            </a:r>
+            <a:r>
+              <a:rPr lang="en-US" sz="1500" b="0" i="0" u="none" strike="noStrike" cap="none" dirty="0" err="1">
+                <a:solidFill>
+                  <a:srgbClr val="475569"/>
+                </a:solidFill>
+                <a:latin typeface="Urbanist"/>
+                <a:ea typeface="Urbanist"/>
+                <a:cs typeface="Urbanist"/>
+                <a:sym typeface="Urbanist"/>
+              </a:rPr>
+              <a:t>lokalnego</a:t>
+            </a:r>
+            <a:r>
+              <a:rPr lang="en-US" sz="1500" b="0" i="0" u="none" strike="noStrike" cap="none" dirty="0">
+                <a:solidFill>
+                  <a:srgbClr val="475569"/>
+                </a:solidFill>
+                <a:latin typeface="Urbanist"/>
+                <a:ea typeface="Urbanist"/>
+                <a:cs typeface="Urbanist"/>
+                <a:sym typeface="Urbanist"/>
+              </a:rPr>
+              <a:t> </a:t>
+            </a:r>
+            <a:r>
+              <a:rPr lang="en-US" sz="1500" b="0" i="0" u="none" strike="noStrike" cap="none" dirty="0" err="1">
+                <a:solidFill>
+                  <a:srgbClr val="475569"/>
+                </a:solidFill>
+                <a:latin typeface="Urbanist"/>
+                <a:ea typeface="Urbanist"/>
+                <a:cs typeface="Urbanist"/>
+                <a:sym typeface="Urbanist"/>
+              </a:rPr>
+              <a:t>na</a:t>
+            </a:r>
+            <a:r>
+              <a:rPr lang="en-US" sz="1500" b="0" i="0" u="none" strike="noStrike" cap="none" dirty="0">
+                <a:solidFill>
+                  <a:srgbClr val="475569"/>
+                </a:solidFill>
+                <a:latin typeface="Urbanist"/>
+                <a:ea typeface="Urbanist"/>
+                <a:cs typeface="Urbanist"/>
+                <a:sym typeface="Urbanist"/>
+              </a:rPr>
+              <a:t> </a:t>
+            </a:r>
+            <a:r>
+              <a:rPr lang="en-US" sz="1500" b="0" i="0" u="none" strike="noStrike" cap="none" dirty="0" err="1">
+                <a:solidFill>
+                  <a:srgbClr val="475569"/>
+                </a:solidFill>
+                <a:latin typeface="Urbanist"/>
+                <a:ea typeface="Urbanist"/>
+                <a:cs typeface="Urbanist"/>
+                <a:sym typeface="Urbanist"/>
+              </a:rPr>
+              <a:t>architekturę</a:t>
+            </a:r>
+            <a:r>
+              <a:rPr lang="en-US" sz="1500" b="0" i="0" u="none" strike="noStrike" cap="none" dirty="0">
+                <a:solidFill>
+                  <a:srgbClr val="475569"/>
+                </a:solidFill>
+                <a:latin typeface="Urbanist"/>
+                <a:ea typeface="Urbanist"/>
+                <a:cs typeface="Urbanist"/>
+                <a:sym typeface="Urbanist"/>
+              </a:rPr>
+              <a:t> </a:t>
+            </a:r>
+            <a:r>
+              <a:rPr lang="en-US" sz="1500" b="0" i="0" u="none" strike="noStrike" cap="none" dirty="0" err="1">
+                <a:solidFill>
+                  <a:srgbClr val="475569"/>
+                </a:solidFill>
+                <a:latin typeface="Urbanist"/>
+                <a:ea typeface="Urbanist"/>
+                <a:cs typeface="Urbanist"/>
+                <a:sym typeface="Urbanist"/>
+              </a:rPr>
+              <a:t>webową</a:t>
+            </a:r>
+            <a:r>
+              <a:rPr lang="en-US" sz="1500" b="0" i="0" u="none" strike="noStrike" cap="none" dirty="0">
+                <a:solidFill>
+                  <a:srgbClr val="475569"/>
+                </a:solidFill>
+                <a:latin typeface="Urbanist"/>
+                <a:ea typeface="Urbanist"/>
+                <a:cs typeface="Urbanist"/>
+                <a:sym typeface="Urbanist"/>
+              </a:rPr>
+              <a:t> </a:t>
+            </a:r>
+            <a:r>
+              <a:rPr lang="en-US" sz="1500" b="0" i="0" u="none" strike="noStrike" cap="none" dirty="0" err="1">
+                <a:solidFill>
+                  <a:srgbClr val="475569"/>
+                </a:solidFill>
+                <a:latin typeface="Urbanist"/>
+                <a:ea typeface="Urbanist"/>
+                <a:cs typeface="Urbanist"/>
+                <a:sym typeface="Urbanist"/>
+              </a:rPr>
+              <a:t>pozwoliło</a:t>
+            </a:r>
+            <a:r>
+              <a:rPr lang="en-US" sz="1500" b="0" i="0" u="none" strike="noStrike" cap="none" dirty="0">
+                <a:solidFill>
+                  <a:srgbClr val="475569"/>
+                </a:solidFill>
+                <a:latin typeface="Urbanist"/>
+                <a:ea typeface="Urbanist"/>
+                <a:cs typeface="Urbanist"/>
+                <a:sym typeface="Urbanist"/>
+              </a:rPr>
+              <a:t> </a:t>
+            </a:r>
+            <a:r>
+              <a:rPr lang="en-US" sz="1500" b="0" i="0" u="none" strike="noStrike" cap="none" dirty="0" err="1">
+                <a:solidFill>
+                  <a:srgbClr val="475569"/>
+                </a:solidFill>
+                <a:latin typeface="Urbanist"/>
+                <a:ea typeface="Urbanist"/>
+                <a:cs typeface="Urbanist"/>
+                <a:sym typeface="Urbanist"/>
+              </a:rPr>
+              <a:t>na</a:t>
+            </a:r>
+            <a:r>
+              <a:rPr lang="en-US" sz="1500" b="0" i="0" u="none" strike="noStrike" cap="none" dirty="0">
+                <a:solidFill>
+                  <a:srgbClr val="475569"/>
+                </a:solidFill>
+                <a:latin typeface="Urbanist"/>
+                <a:ea typeface="Urbanist"/>
+                <a:cs typeface="Urbanist"/>
+                <a:sym typeface="Urbanist"/>
+              </a:rPr>
+              <a:t> </a:t>
+            </a:r>
+            <a:r>
+              <a:rPr lang="en-US" sz="1500" b="0" i="0" u="none" strike="noStrike" cap="none" dirty="0" err="1">
+                <a:solidFill>
+                  <a:srgbClr val="475569"/>
+                </a:solidFill>
+                <a:latin typeface="Urbanist"/>
+                <a:ea typeface="Urbanist"/>
+                <a:cs typeface="Urbanist"/>
+                <a:sym typeface="Urbanist"/>
+              </a:rPr>
+              <a:t>centralizację</a:t>
+            </a:r>
+            <a:r>
+              <a:rPr lang="en-US" sz="1500" b="0" i="0" u="none" strike="noStrike" cap="none" dirty="0">
+                <a:solidFill>
+                  <a:srgbClr val="475569"/>
+                </a:solidFill>
+                <a:latin typeface="Urbanist"/>
+                <a:ea typeface="Urbanist"/>
+                <a:cs typeface="Urbanist"/>
+                <a:sym typeface="Urbanist"/>
+              </a:rPr>
+              <a:t> </a:t>
+            </a:r>
+            <a:r>
+              <a:rPr lang="en-US" sz="1500" b="0" i="0" u="none" strike="noStrike" cap="none" dirty="0" err="1">
+                <a:solidFill>
+                  <a:srgbClr val="475569"/>
+                </a:solidFill>
+                <a:latin typeface="Urbanist"/>
+                <a:ea typeface="Urbanist"/>
+                <a:cs typeface="Urbanist"/>
+                <a:sym typeface="Urbanist"/>
+              </a:rPr>
+              <a:t>danych</a:t>
+            </a:r>
+            <a:r>
+              <a:rPr lang="en-US" sz="1500" b="0" i="0" u="none" strike="noStrike" cap="none" dirty="0">
+                <a:solidFill>
+                  <a:srgbClr val="475569"/>
+                </a:solidFill>
+                <a:latin typeface="Urbanist"/>
+                <a:ea typeface="Urbanist"/>
+                <a:cs typeface="Urbanist"/>
+                <a:sym typeface="Urbanist"/>
+              </a:rPr>
+              <a:t> </a:t>
+            </a:r>
+            <a:r>
+              <a:rPr lang="en-US" sz="1500" b="0" i="0" u="none" strike="noStrike" cap="none" dirty="0" err="1">
+                <a:solidFill>
+                  <a:srgbClr val="475569"/>
+                </a:solidFill>
+                <a:latin typeface="Urbanist"/>
+                <a:ea typeface="Urbanist"/>
+                <a:cs typeface="Urbanist"/>
+                <a:sym typeface="Urbanist"/>
+              </a:rPr>
+              <a:t>i</a:t>
+            </a:r>
+            <a:r>
+              <a:rPr lang="en-US" sz="1500" b="0" i="0" u="none" strike="noStrike" cap="none" dirty="0">
+                <a:solidFill>
+                  <a:srgbClr val="475569"/>
+                </a:solidFill>
+                <a:latin typeface="Urbanist"/>
+                <a:ea typeface="Urbanist"/>
+                <a:cs typeface="Urbanist"/>
+                <a:sym typeface="Urbanist"/>
+              </a:rPr>
+              <a:t> </a:t>
+            </a:r>
+            <a:r>
+              <a:rPr lang="en-US" sz="1500" b="0" i="0" u="none" strike="noStrike" cap="none" dirty="0" err="1">
+                <a:solidFill>
+                  <a:srgbClr val="475569"/>
+                </a:solidFill>
+                <a:latin typeface="Urbanist"/>
+                <a:ea typeface="Urbanist"/>
+                <a:cs typeface="Urbanist"/>
+                <a:sym typeface="Urbanist"/>
+              </a:rPr>
+              <a:t>poprawę</a:t>
+            </a:r>
+            <a:r>
+              <a:rPr lang="en-US" sz="1500" b="0" i="0" u="none" strike="noStrike" cap="none" dirty="0">
+                <a:solidFill>
+                  <a:srgbClr val="475569"/>
+                </a:solidFill>
+                <a:latin typeface="Urbanist"/>
+                <a:ea typeface="Urbanist"/>
+                <a:cs typeface="Urbanist"/>
+                <a:sym typeface="Urbanist"/>
+              </a:rPr>
+              <a:t> </a:t>
+            </a:r>
+            <a:r>
+              <a:rPr lang="en-US" sz="1500" b="0" i="0" u="none" strike="noStrike" cap="none" dirty="0" err="1">
+                <a:solidFill>
+                  <a:srgbClr val="475569"/>
+                </a:solidFill>
+                <a:latin typeface="Urbanist"/>
+                <a:ea typeface="Urbanist"/>
+                <a:cs typeface="Urbanist"/>
+                <a:sym typeface="Urbanist"/>
+              </a:rPr>
+              <a:t>ergonomii</a:t>
+            </a:r>
+            <a:r>
+              <a:rPr lang="en-US" sz="1500" b="0" i="0" u="none" strike="noStrike" cap="none" dirty="0">
+                <a:solidFill>
+                  <a:srgbClr val="475569"/>
+                </a:solidFill>
+                <a:latin typeface="Urbanist"/>
+                <a:ea typeface="Urbanist"/>
+                <a:cs typeface="Urbanist"/>
+                <a:sym typeface="Urbanist"/>
+              </a:rPr>
+              <a:t> </a:t>
+            </a:r>
+            <a:r>
+              <a:rPr lang="en-US" sz="1500" b="0" i="0" u="none" strike="noStrike" cap="none" dirty="0" err="1">
+                <a:solidFill>
+                  <a:srgbClr val="475569"/>
+                </a:solidFill>
+                <a:latin typeface="Urbanist"/>
+                <a:ea typeface="Urbanist"/>
+                <a:cs typeface="Urbanist"/>
+                <a:sym typeface="Urbanist"/>
+              </a:rPr>
+              <a:t>pracy</a:t>
+            </a:r>
+            <a:r>
+              <a:rPr lang="en-US" sz="1500" b="0" i="0" u="none" strike="noStrike" cap="none" dirty="0">
+                <a:solidFill>
+                  <a:srgbClr val="475569"/>
+                </a:solidFill>
+                <a:latin typeface="Urbanist"/>
+                <a:ea typeface="Urbanist"/>
+                <a:cs typeface="Urbanist"/>
+                <a:sym typeface="Urbanist"/>
+              </a:rPr>
+              <a:t> </a:t>
+            </a:r>
+            <a:r>
+              <a:rPr lang="en-US" sz="1500" b="0" i="0" u="none" strike="noStrike" cap="none" dirty="0" err="1">
+                <a:solidFill>
+                  <a:srgbClr val="475569"/>
+                </a:solidFill>
+                <a:latin typeface="Urbanist"/>
+                <a:ea typeface="Urbanist"/>
+                <a:cs typeface="Urbanist"/>
+                <a:sym typeface="Urbanist"/>
+              </a:rPr>
+              <a:t>biurowej</a:t>
+            </a:r>
+            <a:r>
+              <a:rPr lang="en-US" sz="1500" b="0" i="0" u="none" strike="noStrike" cap="none" dirty="0">
+                <a:solidFill>
+                  <a:srgbClr val="475569"/>
+                </a:solidFill>
+                <a:latin typeface="Urbanist"/>
+                <a:ea typeface="Urbanist"/>
+                <a:cs typeface="Urbanist"/>
+                <a:sym typeface="Urbanist"/>
+              </a:rPr>
+              <a:t>.</a:t>
+            </a:r>
+            <a:endParaRPr dirty="0"/>
           </a:p>
         </p:txBody>
       </p:sp>
-      <p:pic>
-        <p:nvPicPr>
-          <p:cNvPr id="116" name="Google Shape;116;p16" descr="image.png"/>
-          <p:cNvPicPr preferRelativeResize="0"/>
-          <p:nvPr/>
-        </p:nvPicPr>
-        <p:blipFill rotWithShape="1">
-          <a:blip r:embed="rId5">
-            <a:alphaModFix/>
-          </a:blip>
-          <a:srcRect/>
-          <a:stretch/>
-        </p:blipFill>
-        <p:spPr>
-          <a:xfrm>
-            <a:off x="6391275" y="2088058"/>
-            <a:ext cx="1990725" cy="180975"/>
-          </a:xfrm>
-          <a:prstGeom prst="rect">
-            <a:avLst/>
-          </a:prstGeom>
-          <a:noFill/>
-          <a:ln>
-            <a:noFill/>
-          </a:ln>
-        </p:spPr>
-      </p:pic>
       <p:sp>
         <p:nvSpPr>
           <p:cNvPr id="117" name="Google Shape;117;p16"/>
@@ -16781,7 +17735,7 @@
           <p:nvPr/>
         </p:nvPicPr>
         <p:blipFill rotWithShape="1">
-          <a:blip r:embed="rId6">
+          <a:blip r:embed="rId4">
             <a:alphaModFix/>
           </a:blip>
           <a:srcRect/>
@@ -16808,7 +17762,7 @@
           <p:nvPr/>
         </p:nvPicPr>
         <p:blipFill rotWithShape="1">
-          <a:blip r:embed="rId6">
+          <a:blip r:embed="rId4">
             <a:alphaModFix/>
           </a:blip>
           <a:srcRect/>
@@ -16835,7 +17789,7 @@
           <p:nvPr/>
         </p:nvPicPr>
         <p:blipFill rotWithShape="1">
-          <a:blip r:embed="rId6">
+          <a:blip r:embed="rId4">
             <a:alphaModFix/>
           </a:blip>
           <a:srcRect/>
@@ -16953,6 +17907,47 @@
           </a:p>
         </p:txBody>
       </p:sp>
+      <p:pic>
+        <p:nvPicPr>
+          <p:cNvPr id="15" name="Picture 2" descr="https://scontent.fktw6-1.fna.fbcdn.net/v/t39.30808-6/435798839_333955379691811_5190538711917450791_n.jpg?_nc_cat=109&amp;ccb=1-7&amp;_nc_sid=6ee11a&amp;_nc_ohc=jwWeytG3sKUQ7kNvwHmkqEb&amp;_nc_oc=AdlzYnN-7oJMisHeUwJhFiXzGLedh-q1vCCARfs6aTDAmvTUfF1PwWmZJ3ZDq1azUr9OUwQ1BBfDPMPJ8uoXfWJY&amp;_nc_zt=23&amp;_nc_ht=scontent.fktw6-1.fna&amp;_nc_gid=-tfgam0vqOHqeoiKfmb1PQ&amp;oh=00_Afux1aGd0-WoR3IeqyDA5e3CqwrUyJXyTZLSgWtgOY08MA&amp;oe=698FF599"/>
+          <p:cNvPicPr>
+            <a:picLocks noChangeAspect="1" noChangeArrowheads="1"/>
+          </p:cNvPicPr>
+          <p:nvPr/>
+        </p:nvPicPr>
+        <p:blipFill>
+          <a:blip r:embed="rId5">
+            <a:extLst>
+              <a:ext uri="{28A0092B-C50C-407E-A947-70E740481C1C}">
+                <a14:useLocalDpi xmlns:a14="http://schemas.microsoft.com/office/drawing/2010/main" val="0"/>
+              </a:ext>
+            </a:extLst>
+          </a:blip>
+          <a:srcRect/>
+          <a:stretch>
+            <a:fillRect/>
+          </a:stretch>
+        </p:blipFill>
+        <p:spPr bwMode="auto">
+          <a:xfrm>
+            <a:off x="6643687" y="1406841"/>
+            <a:ext cx="4805582" cy="4805582"/>
+          </a:xfrm>
+          <a:prstGeom prst="rect">
+            <a:avLst/>
+          </a:prstGeom>
+          <a:noFill/>
+          <a:extLst>
+            <a:ext uri="{909E8E84-426E-40DD-AFC4-6F175D3DCCD1}">
+              <a14:hiddenFill xmlns:a14="http://schemas.microsoft.com/office/drawing/2010/main">
+                <a:solidFill>
+                  <a:srgbClr val="FFFFFF"/>
+                </a:solidFill>
+              </a14:hiddenFill>
+            </a:ext>
+          </a:extLst>
+        </p:spPr>
+      </p:pic>
     </p:spTree>
   </p:cSld>
   <p:clrMapOvr>
